--- a/classes/parte-14-grc-riesgo-y-cumplimiento/280-controles-cis/clase-280-presentacion.pptx
+++ b/classes/parte-14-grc-riesgo-y-cumplimiento/280-controles-cis/clase-280-presentacion.pptx
@@ -17,6 +17,10 @@
     <p:sldId id="265" r:id="rId16"/>
     <p:sldId id="266" r:id="rId17"/>
     <p:sldId id="267" r:id="rId18"/>
+    <p:sldId id="268" r:id="rId19"/>
+    <p:sldId id="269" r:id="rId20"/>
+    <p:sldId id="270" r:id="rId21"/>
+    <p:sldId id="271" r:id="rId22"/>
   </p:sldIdLst>
   <p:sldSz cx="9144000" cy="6858000" type="screen4x3"/>
   <p:notesSz cx="6858000" cy="9144000"/>
@@ -3198,7 +3202,7 @@
                   <a:srgbClr val="0B3D2E"/>
                 </a:solidFill>
               </a:rPr>
-              <a:t>⚠️ Errores comunes</a:t>
+              <a:t>🧪 Laboratorio guiado (ejercicio aplicado)</a:t>
             </a:r>
           </a:p>
         </p:txBody>
@@ -3236,67 +3240,97 @@
                   <a:srgbClr val="22282E"/>
                 </a:solidFill>
               </a:rPr>
-              <a:t>•  Intentar implantar los 18 controles a la vez — Sobrecarga; empieza por IG1 y escala</a:t>
-            </a:r>
-          </a:p>
-          <a:p>
-            <a:pPr>
-              <a:spcAft>
-                <a:spcPts val="600"/>
-              </a:spcAft>
-            </a:pPr>
-            <a:r>
-              <a:rPr sz="1500">
-                <a:solidFill>
-                  <a:srgbClr val="22282E"/>
-                </a:solidFill>
-              </a:rPr>
-              <a:t>•  Saltarse el inventario (Controles 1–2) — Todo lo demás depende de conocer los activos; empieza ahí</a:t>
-            </a:r>
-          </a:p>
-          <a:p>
-            <a:pPr>
-              <a:spcAft>
-                <a:spcPts val="600"/>
-              </a:spcAft>
-            </a:pPr>
-            <a:r>
-              <a:rPr sz="1500">
-                <a:solidFill>
-                  <a:srgbClr val="22282E"/>
-                </a:solidFill>
-              </a:rPr>
-              <a:t>•  Aplicar un Benchmark en producción sin probar — Puede romper servicios; prueba primero en VM</a:t>
-            </a:r>
-          </a:p>
-          <a:p>
-            <a:pPr>
-              <a:spcAft>
-                <a:spcPts val="600"/>
-              </a:spcAft>
-            </a:pPr>
-            <a:r>
-              <a:rPr sz="1500">
-                <a:solidFill>
-                  <a:srgbClr val="22282E"/>
-                </a:solidFill>
-              </a:rPr>
-              <a:t>•  Confundir CIS Controls con CIS Benchmarks — Controles = qué hacer; Benchmarks = cómo configurar un producto</a:t>
-            </a:r>
-          </a:p>
-          <a:p>
-            <a:pPr>
-              <a:spcAft>
-                <a:spcPts val="600"/>
-              </a:spcAft>
-            </a:pPr>
-            <a:r>
-              <a:rPr sz="1500">
-                <a:solidFill>
-                  <a:srgbClr val="22282E"/>
-                </a:solidFill>
-              </a:rPr>
-              <a:t>•  No medir el progreso — Define % de salvaguardas implementadas como KPI</a:t>
+              <a:t>•  Parte A — Plan de salvaguardas IG1 para "Ferretería del Sur S.A.":</a:t>
+            </a:r>
+          </a:p>
+          <a:p>
+            <a:pPr>
+              <a:spcAft>
+                <a:spcPts val="600"/>
+              </a:spcAft>
+            </a:pPr>
+            <a:r>
+              <a:rPr sz="1500">
+                <a:solidFill>
+                  <a:srgbClr val="22282E"/>
+                </a:solidFill>
+              </a:rPr>
+              <a:t>•  Descarga los CIS Controls v8.1 y filtra las salvaguardas marcadas como IG1.</a:t>
+            </a:r>
+          </a:p>
+          <a:p>
+            <a:pPr>
+              <a:spcAft>
+                <a:spcPts val="600"/>
+              </a:spcAft>
+            </a:pPr>
+            <a:r>
+              <a:rPr sz="1500">
+                <a:solidFill>
+                  <a:srgbClr val="22282E"/>
+                </a:solidFill>
+              </a:rPr>
+              <a:t>•  Inventario (Control 1 y 2): lista cómo mantendrías el inventario de activos y software; anota la herramienta que usarías.</a:t>
+            </a:r>
+          </a:p>
+          <a:p>
+            <a:pPr>
+              <a:spcAft>
+                <a:spcPts val="600"/>
+              </a:spcAft>
+            </a:pPr>
+            <a:r>
+              <a:rPr sz="1500">
+                <a:solidFill>
+                  <a:srgbClr val="22282E"/>
+                </a:solidFill>
+              </a:rPr>
+              <a:t>•  Selecciona 15 salvaguardas IG1 prioritarias (gestión de cuentas, MFA, configuración segura, copias de seguridad, formación) y ponlas en una hoja con: control, salvaguarda, estado actual, acción…</a:t>
+            </a:r>
+          </a:p>
+          <a:p>
+            <a:pPr>
+              <a:spcAft>
+                <a:spcPts val="600"/>
+              </a:spcAft>
+            </a:pPr>
+            <a:r>
+              <a:rPr sz="1500">
+                <a:solidFill>
+                  <a:srgbClr val="22282E"/>
+                </a:solidFill>
+              </a:rPr>
+              <a:t>•  Parte B — Endurecimiento con un Benchmark (VM Ubuntu):</a:t>
+            </a:r>
+          </a:p>
+          <a:p>
+            <a:pPr>
+              <a:spcAft>
+                <a:spcPts val="600"/>
+              </a:spcAft>
+            </a:pPr>
+            <a:r>
+              <a:rPr sz="1500">
+                <a:solidFill>
+                  <a:srgbClr val="22282E"/>
+                </a:solidFill>
+              </a:rPr>
+              <a:t>•  En tu VM aislada, ejecuta una auditoría base:</a:t>
+            </a:r>
+          </a:p>
+          <a:p>
+            <a:pPr>
+              <a:spcAft>
+                <a:spcPts val="600"/>
+              </a:spcAft>
+            </a:pPr>
+            <a:r>
+              <a:rPr sz="1500">
+                <a:solidFill>
+                  <a:srgbClr val="22282E"/>
+                </a:solidFill>
+              </a:rPr>
+              <a:t>•  Anota el "Hardening index" inicial y 5 sugerencias de Lynis.</a:t>
             </a:r>
           </a:p>
         </p:txBody>
@@ -3347,7 +3381,7 @@
                   <a:srgbClr val="0B3D2E"/>
                 </a:solidFill>
               </a:rPr>
-              <a:t>❓ Preguntas frecuentes</a:t>
+              <a:t>✍️ Ejercicios</a:t>
             </a:r>
           </a:p>
         </p:txBody>
@@ -3385,97 +3419,82 @@
                   <a:srgbClr val="22282E"/>
                 </a:solidFill>
               </a:rPr>
-              <a:t>•  ❓ ¿CIS reemplaza a NIST CSF o ISO 27001?</a:t>
-            </a:r>
-          </a:p>
-          <a:p>
-            <a:pPr>
-              <a:spcAft>
-                <a:spcPts val="600"/>
-              </a:spcAft>
-            </a:pPr>
-            <a:r>
-              <a:rPr sz="1500">
-                <a:solidFill>
-                  <a:srgbClr val="22282E"/>
-                </a:solidFill>
-              </a:rPr>
-              <a:t>•  No. CIS es el "cómo" técnico y priorizado; CSF/ISO son los marcos de gestión. CIS publica mapeos oficiales entre ellos.</a:t>
-            </a:r>
-          </a:p>
-          <a:p>
-            <a:pPr>
-              <a:spcAft>
-                <a:spcPts val="600"/>
-              </a:spcAft>
-            </a:pPr>
-            <a:r>
-              <a:rPr sz="1500">
-                <a:solidFill>
-                  <a:srgbClr val="22282E"/>
-                </a:solidFill>
-              </a:rPr>
-              <a:t>•  ❓ ¿Por dónde empiezo con recursos mínimos?</a:t>
-            </a:r>
-          </a:p>
-          <a:p>
-            <a:pPr>
-              <a:spcAft>
-                <a:spcPts val="600"/>
-              </a:spcAft>
-            </a:pPr>
-            <a:r>
-              <a:rPr sz="1500">
-                <a:solidFill>
-                  <a:srgbClr val="22282E"/>
-                </a:solidFill>
-              </a:rPr>
-              <a:t>•  Por IG1: inventario de activos y software, gestión de cuentas, MFA, configuración segura y copias de seguridad. Es la higiene esencial defendible.</a:t>
-            </a:r>
-          </a:p>
-          <a:p>
-            <a:pPr>
-              <a:spcAft>
-                <a:spcPts val="600"/>
-              </a:spcAft>
-            </a:pPr>
-            <a:r>
-              <a:rPr sz="1500">
-                <a:solidFill>
-                  <a:srgbClr val="22282E"/>
-                </a:solidFill>
-              </a:rPr>
-              <a:t>•  ❓ ¿Los CIS Benchmarks son gratis?</a:t>
-            </a:r>
-          </a:p>
-          <a:p>
-            <a:pPr>
-              <a:spcAft>
-                <a:spcPts val="600"/>
-              </a:spcAft>
-            </a:pPr>
-            <a:r>
-              <a:rPr sz="1500">
-                <a:solidFill>
-                  <a:srgbClr val="22282E"/>
-                </a:solidFill>
-              </a:rPr>
-              <a:t>•  Los PDF sí, tras registro. Herramientas como CIS-CAT Pro requieren membresía; CIS-CAT Lite y Lynis cubren lo básico.</a:t>
-            </a:r>
-          </a:p>
-          <a:p>
-            <a:pPr>
-              <a:spcAft>
-                <a:spcPts val="600"/>
-              </a:spcAft>
-            </a:pPr>
-            <a:r>
-              <a:rPr sz="1500">
-                <a:solidFill>
-                  <a:srgbClr val="22282E"/>
-                </a:solidFill>
-              </a:rPr>
-              <a:t>•  ❓ ¿Cada cuánto se actualizan?</a:t>
+              <a:t>•  Ordena estos controles CIS por su número y explica por qué el inventario va primero.</a:t>
+            </a:r>
+          </a:p>
+          <a:p>
+            <a:pPr>
+              <a:spcAft>
+                <a:spcPts val="600"/>
+              </a:spcAft>
+            </a:pPr>
+            <a:r>
+              <a:rPr sz="1500">
+                <a:solidFill>
+                  <a:srgbClr val="22282E"/>
+                </a:solidFill>
+              </a:rPr>
+              <a:t>•  Una PYME sin equipo de seguridad: ¿qué IG le corresponde y por qué?</a:t>
+            </a:r>
+          </a:p>
+          <a:p>
+            <a:pPr>
+              <a:spcAft>
+                <a:spcPts val="600"/>
+              </a:spcAft>
+            </a:pPr>
+            <a:r>
+              <a:rPr sz="1500">
+                <a:solidFill>
+                  <a:srgbClr val="22282E"/>
+                </a:solidFill>
+              </a:rPr>
+              <a:t>•  Elige 5 salvaguardas IG1 y clasifícalas en preventivas o detectivas.</a:t>
+            </a:r>
+          </a:p>
+          <a:p>
+            <a:pPr>
+              <a:spcAft>
+                <a:spcPts val="600"/>
+              </a:spcAft>
+            </a:pPr>
+            <a:r>
+              <a:rPr sz="1500">
+                <a:solidFill>
+                  <a:srgbClr val="22282E"/>
+                </a:solidFill>
+              </a:rPr>
+              <a:t>•  Explica qué es un CIS Benchmark y da un ejemplo de regla de endurecimiento SSH.</a:t>
+            </a:r>
+          </a:p>
+          <a:p>
+            <a:pPr>
+              <a:spcAft>
+                <a:spcPts val="600"/>
+              </a:spcAft>
+            </a:pPr>
+            <a:r>
+              <a:rPr sz="1500">
+                <a:solidFill>
+                  <a:srgbClr val="22282E"/>
+                </a:solidFill>
+              </a:rPr>
+              <a:t>•  Mapea el control "MFA en accesos remotos" a CSF, ISO 27001 y PCI-DSS.</a:t>
+            </a:r>
+          </a:p>
+          <a:p>
+            <a:pPr>
+              <a:spcAft>
+                <a:spcPts val="600"/>
+              </a:spcAft>
+            </a:pPr>
+            <a:r>
+              <a:rPr sz="1500">
+                <a:solidFill>
+                  <a:srgbClr val="22282E"/>
+                </a:solidFill>
+              </a:rPr>
+              <a:t>•  Propón cómo medirías el porcentaje de salvaguardas IG1 implementadas.</a:t>
             </a:r>
           </a:p>
         </p:txBody>
@@ -3526,7 +3545,7 @@
                   <a:srgbClr val="0B3D2E"/>
                 </a:solidFill>
               </a:rPr>
-              <a:t>🔗 Referencias</a:t>
+              <a:t>📝 Reto verificable</a:t>
             </a:r>
           </a:p>
         </p:txBody>
@@ -3564,6 +3583,438 @@
                   <a:srgbClr val="22282E"/>
                 </a:solidFill>
               </a:rPr>
+              <a:t>•  Entrega un plan de higiene cibernética IG1 con al menos 20 salvaguardas priorizadas (estado, acción, responsable) y evidencia de un endurecimiento real en VM (índice de Lynis antes/después de aplicar…</a:t>
+            </a:r>
+          </a:p>
+          <a:p>
+            <a:pPr>
+              <a:spcAft>
+                <a:spcPts val="600"/>
+              </a:spcAft>
+            </a:pPr>
+            <a:r>
+              <a:rPr sz="1500">
+                <a:solidFill>
+                  <a:srgbClr val="22282E"/>
+                </a:solidFill>
+              </a:rPr>
+              <a:t>•  Criterio de aceptación: el plan cubre al menos 8 de los 18 controles, el índice de Lynis mejora tras el endurecimiento, y 5 salvaguardas están mapeadas a CSF/ISO.</a:t>
+            </a:r>
+          </a:p>
+        </p:txBody>
+      </p:sp>
+    </p:spTree>
+  </p:cSld>
+  <p:clrMapOvr>
+    <a:masterClrMapping/>
+  </p:clrMapOvr>
+</p:sld>
+</file>
+
+<file path=ppt/slides/slide13.xml><?xml version="1.0" encoding="utf-8"?>
+<p:sld xmlns:a="http://schemas.openxmlformats.org/drawingml/2006/main" xmlns:p="http://schemas.openxmlformats.org/presentationml/2006/main" xmlns:r="http://schemas.openxmlformats.org/officeDocument/2006/relationships">
+  <p:cSld>
+    <p:spTree>
+      <p:nvGrpSpPr>
+        <p:cNvPr id="1" name=""/>
+        <p:cNvGrpSpPr/>
+        <p:nvPr/>
+      </p:nvGrpSpPr>
+      <p:grpSpPr/>
+      <p:sp>
+        <p:nvSpPr>
+          <p:cNvPr id="2" name="TextBox 1"/>
+          <p:cNvSpPr txBox="1"/>
+          <p:nvPr/>
+        </p:nvSpPr>
+        <p:spPr>
+          <a:xfrm>
+            <a:off x="457200" y="320040"/>
+            <a:ext cx="8229600" cy="822960"/>
+          </a:xfrm>
+          <a:prstGeom prst="rect">
+            <a:avLst/>
+          </a:prstGeom>
+          <a:noFill/>
+        </p:spPr>
+        <p:txBody>
+          <a:bodyPr wrap="square">
+            <a:spAutoFit/>
+          </a:bodyPr>
+          <a:lstStyle/>
+          <a:p>
+            <a:r>
+              <a:rPr sz="2600" b="1">
+                <a:solidFill>
+                  <a:srgbClr val="0B3D2E"/>
+                </a:solidFill>
+              </a:rPr>
+              <a:t>⚠️ Errores comunes</a:t>
+            </a:r>
+          </a:p>
+        </p:txBody>
+      </p:sp>
+      <p:sp>
+        <p:nvSpPr>
+          <p:cNvPr id="3" name="TextBox 2"/>
+          <p:cNvSpPr txBox="1"/>
+          <p:nvPr/>
+        </p:nvSpPr>
+        <p:spPr>
+          <a:xfrm>
+            <a:off x="457200" y="1280160"/>
+            <a:ext cx="8229600" cy="4937760"/>
+          </a:xfrm>
+          <a:prstGeom prst="rect">
+            <a:avLst/>
+          </a:prstGeom>
+          <a:noFill/>
+        </p:spPr>
+        <p:txBody>
+          <a:bodyPr wrap="square">
+            <a:spAutoFit/>
+          </a:bodyPr>
+          <a:lstStyle/>
+          <a:p>
+            <a:pPr>
+              <a:spcAft>
+                <a:spcPts val="600"/>
+              </a:spcAft>
+            </a:pPr>
+            <a:r>
+              <a:rPr sz="1500">
+                <a:solidFill>
+                  <a:srgbClr val="22282E"/>
+                </a:solidFill>
+              </a:rPr>
+              <a:t>•  Intentar implantar los 18 controles a la vez — Sobrecarga; empieza por IG1 y escala</a:t>
+            </a:r>
+          </a:p>
+          <a:p>
+            <a:pPr>
+              <a:spcAft>
+                <a:spcPts val="600"/>
+              </a:spcAft>
+            </a:pPr>
+            <a:r>
+              <a:rPr sz="1500">
+                <a:solidFill>
+                  <a:srgbClr val="22282E"/>
+                </a:solidFill>
+              </a:rPr>
+              <a:t>•  Saltarse el inventario (Controles 1–2) — Todo lo demás depende de conocer los activos; empieza ahí</a:t>
+            </a:r>
+          </a:p>
+          <a:p>
+            <a:pPr>
+              <a:spcAft>
+                <a:spcPts val="600"/>
+              </a:spcAft>
+            </a:pPr>
+            <a:r>
+              <a:rPr sz="1500">
+                <a:solidFill>
+                  <a:srgbClr val="22282E"/>
+                </a:solidFill>
+              </a:rPr>
+              <a:t>•  Aplicar un Benchmark en producción sin probar — Puede romper servicios; prueba primero en VM</a:t>
+            </a:r>
+          </a:p>
+          <a:p>
+            <a:pPr>
+              <a:spcAft>
+                <a:spcPts val="600"/>
+              </a:spcAft>
+            </a:pPr>
+            <a:r>
+              <a:rPr sz="1500">
+                <a:solidFill>
+                  <a:srgbClr val="22282E"/>
+                </a:solidFill>
+              </a:rPr>
+              <a:t>•  Confundir CIS Controls con CIS Benchmarks — Controles = qué hacer; Benchmarks = cómo configurar un producto</a:t>
+            </a:r>
+          </a:p>
+          <a:p>
+            <a:pPr>
+              <a:spcAft>
+                <a:spcPts val="600"/>
+              </a:spcAft>
+            </a:pPr>
+            <a:r>
+              <a:rPr sz="1500">
+                <a:solidFill>
+                  <a:srgbClr val="22282E"/>
+                </a:solidFill>
+              </a:rPr>
+              <a:t>•  No medir el progreso — Define % de salvaguardas implementadas como KPI</a:t>
+            </a:r>
+          </a:p>
+        </p:txBody>
+      </p:sp>
+    </p:spTree>
+  </p:cSld>
+  <p:clrMapOvr>
+    <a:masterClrMapping/>
+  </p:clrMapOvr>
+</p:sld>
+</file>
+
+<file path=ppt/slides/slide14.xml><?xml version="1.0" encoding="utf-8"?>
+<p:sld xmlns:a="http://schemas.openxmlformats.org/drawingml/2006/main" xmlns:p="http://schemas.openxmlformats.org/presentationml/2006/main" xmlns:r="http://schemas.openxmlformats.org/officeDocument/2006/relationships">
+  <p:cSld>
+    <p:spTree>
+      <p:nvGrpSpPr>
+        <p:cNvPr id="1" name=""/>
+        <p:cNvGrpSpPr/>
+        <p:nvPr/>
+      </p:nvGrpSpPr>
+      <p:grpSpPr/>
+      <p:sp>
+        <p:nvSpPr>
+          <p:cNvPr id="2" name="TextBox 1"/>
+          <p:cNvSpPr txBox="1"/>
+          <p:nvPr/>
+        </p:nvSpPr>
+        <p:spPr>
+          <a:xfrm>
+            <a:off x="457200" y="320040"/>
+            <a:ext cx="8229600" cy="822960"/>
+          </a:xfrm>
+          <a:prstGeom prst="rect">
+            <a:avLst/>
+          </a:prstGeom>
+          <a:noFill/>
+        </p:spPr>
+        <p:txBody>
+          <a:bodyPr wrap="square">
+            <a:spAutoFit/>
+          </a:bodyPr>
+          <a:lstStyle/>
+          <a:p>
+            <a:r>
+              <a:rPr sz="2600" b="1">
+                <a:solidFill>
+                  <a:srgbClr val="0B3D2E"/>
+                </a:solidFill>
+              </a:rPr>
+              <a:t>❓ Preguntas frecuentes</a:t>
+            </a:r>
+          </a:p>
+        </p:txBody>
+      </p:sp>
+      <p:sp>
+        <p:nvSpPr>
+          <p:cNvPr id="3" name="TextBox 2"/>
+          <p:cNvSpPr txBox="1"/>
+          <p:nvPr/>
+        </p:nvSpPr>
+        <p:spPr>
+          <a:xfrm>
+            <a:off x="457200" y="1280160"/>
+            <a:ext cx="8229600" cy="4937760"/>
+          </a:xfrm>
+          <a:prstGeom prst="rect">
+            <a:avLst/>
+          </a:prstGeom>
+          <a:noFill/>
+        </p:spPr>
+        <p:txBody>
+          <a:bodyPr wrap="square">
+            <a:spAutoFit/>
+          </a:bodyPr>
+          <a:lstStyle/>
+          <a:p>
+            <a:pPr>
+              <a:spcAft>
+                <a:spcPts val="600"/>
+              </a:spcAft>
+            </a:pPr>
+            <a:r>
+              <a:rPr sz="1500">
+                <a:solidFill>
+                  <a:srgbClr val="22282E"/>
+                </a:solidFill>
+              </a:rPr>
+              <a:t>•  ❓ ¿CIS reemplaza a NIST CSF o ISO 27001?</a:t>
+            </a:r>
+          </a:p>
+          <a:p>
+            <a:pPr>
+              <a:spcAft>
+                <a:spcPts val="600"/>
+              </a:spcAft>
+            </a:pPr>
+            <a:r>
+              <a:rPr sz="1500">
+                <a:solidFill>
+                  <a:srgbClr val="22282E"/>
+                </a:solidFill>
+              </a:rPr>
+              <a:t>•  No. CIS es el "cómo" técnico y priorizado; CSF/ISO son los marcos de gestión. CIS publica mapeos oficiales entre ellos.</a:t>
+            </a:r>
+          </a:p>
+          <a:p>
+            <a:pPr>
+              <a:spcAft>
+                <a:spcPts val="600"/>
+              </a:spcAft>
+            </a:pPr>
+            <a:r>
+              <a:rPr sz="1500">
+                <a:solidFill>
+                  <a:srgbClr val="22282E"/>
+                </a:solidFill>
+              </a:rPr>
+              <a:t>•  ❓ ¿Por dónde empiezo con recursos mínimos?</a:t>
+            </a:r>
+          </a:p>
+          <a:p>
+            <a:pPr>
+              <a:spcAft>
+                <a:spcPts val="600"/>
+              </a:spcAft>
+            </a:pPr>
+            <a:r>
+              <a:rPr sz="1500">
+                <a:solidFill>
+                  <a:srgbClr val="22282E"/>
+                </a:solidFill>
+              </a:rPr>
+              <a:t>•  Por IG1: inventario de activos y software, gestión de cuentas, MFA, configuración segura y copias de seguridad. Es la higiene esencial defendible.</a:t>
+            </a:r>
+          </a:p>
+          <a:p>
+            <a:pPr>
+              <a:spcAft>
+                <a:spcPts val="600"/>
+              </a:spcAft>
+            </a:pPr>
+            <a:r>
+              <a:rPr sz="1500">
+                <a:solidFill>
+                  <a:srgbClr val="22282E"/>
+                </a:solidFill>
+              </a:rPr>
+              <a:t>•  ❓ ¿Los CIS Benchmarks son gratis?</a:t>
+            </a:r>
+          </a:p>
+          <a:p>
+            <a:pPr>
+              <a:spcAft>
+                <a:spcPts val="600"/>
+              </a:spcAft>
+            </a:pPr>
+            <a:r>
+              <a:rPr sz="1500">
+                <a:solidFill>
+                  <a:srgbClr val="22282E"/>
+                </a:solidFill>
+              </a:rPr>
+              <a:t>•  Los PDF sí, tras registro. Herramientas como CIS-CAT Pro requieren membresía; CIS-CAT Lite y Lynis cubren lo básico.</a:t>
+            </a:r>
+          </a:p>
+          <a:p>
+            <a:pPr>
+              <a:spcAft>
+                <a:spcPts val="600"/>
+              </a:spcAft>
+            </a:pPr>
+            <a:r>
+              <a:rPr sz="1500">
+                <a:solidFill>
+                  <a:srgbClr val="22282E"/>
+                </a:solidFill>
+              </a:rPr>
+              <a:t>•  ❓ ¿Cada cuánto se actualizan?</a:t>
+            </a:r>
+          </a:p>
+        </p:txBody>
+      </p:sp>
+    </p:spTree>
+  </p:cSld>
+  <p:clrMapOvr>
+    <a:masterClrMapping/>
+  </p:clrMapOvr>
+</p:sld>
+</file>
+
+<file path=ppt/slides/slide15.xml><?xml version="1.0" encoding="utf-8"?>
+<p:sld xmlns:a="http://schemas.openxmlformats.org/drawingml/2006/main" xmlns:p="http://schemas.openxmlformats.org/presentationml/2006/main" xmlns:r="http://schemas.openxmlformats.org/officeDocument/2006/relationships">
+  <p:cSld>
+    <p:spTree>
+      <p:nvGrpSpPr>
+        <p:cNvPr id="1" name=""/>
+        <p:cNvGrpSpPr/>
+        <p:nvPr/>
+      </p:nvGrpSpPr>
+      <p:grpSpPr/>
+      <p:sp>
+        <p:nvSpPr>
+          <p:cNvPr id="2" name="TextBox 1"/>
+          <p:cNvSpPr txBox="1"/>
+          <p:nvPr/>
+        </p:nvSpPr>
+        <p:spPr>
+          <a:xfrm>
+            <a:off x="457200" y="320040"/>
+            <a:ext cx="8229600" cy="822960"/>
+          </a:xfrm>
+          <a:prstGeom prst="rect">
+            <a:avLst/>
+          </a:prstGeom>
+          <a:noFill/>
+        </p:spPr>
+        <p:txBody>
+          <a:bodyPr wrap="square">
+            <a:spAutoFit/>
+          </a:bodyPr>
+          <a:lstStyle/>
+          <a:p>
+            <a:r>
+              <a:rPr sz="2600" b="1">
+                <a:solidFill>
+                  <a:srgbClr val="0B3D2E"/>
+                </a:solidFill>
+              </a:rPr>
+              <a:t>🔗 Referencias</a:t>
+            </a:r>
+          </a:p>
+        </p:txBody>
+      </p:sp>
+      <p:sp>
+        <p:nvSpPr>
+          <p:cNvPr id="3" name="TextBox 2"/>
+          <p:cNvSpPr txBox="1"/>
+          <p:nvPr/>
+        </p:nvSpPr>
+        <p:spPr>
+          <a:xfrm>
+            <a:off x="457200" y="1280160"/>
+            <a:ext cx="8229600" cy="4937760"/>
+          </a:xfrm>
+          <a:prstGeom prst="rect">
+            <a:avLst/>
+          </a:prstGeom>
+          <a:noFill/>
+        </p:spPr>
+        <p:txBody>
+          <a:bodyPr wrap="square">
+            <a:spAutoFit/>
+          </a:bodyPr>
+          <a:lstStyle/>
+          <a:p>
+            <a:pPr>
+              <a:spcAft>
+                <a:spcPts val="600"/>
+              </a:spcAft>
+            </a:pPr>
+            <a:r>
+              <a:rPr sz="1500">
+                <a:solidFill>
+                  <a:srgbClr val="22282E"/>
+                </a:solidFill>
+              </a:rPr>
               <a:t>•  CIS Critical Security Controls v8.1. &lt;https://www.cisecurity.org/controls/v8-1&gt;</a:t>
             </a:r>
           </a:p>
@@ -3629,6 +4080,81 @@
           </a:p>
         </p:txBody>
       </p:sp>
+    </p:spTree>
+  </p:cSld>
+  <p:clrMapOvr>
+    <a:masterClrMapping/>
+  </p:clrMapOvr>
+</p:sld>
+</file>
+
+<file path=ppt/slides/slide16.xml><?xml version="1.0" encoding="utf-8"?>
+<p:sld xmlns:a="http://schemas.openxmlformats.org/drawingml/2006/main" xmlns:p="http://schemas.openxmlformats.org/presentationml/2006/main" xmlns:r="http://schemas.openxmlformats.org/officeDocument/2006/relationships">
+  <p:cSld>
+    <p:spTree>
+      <p:nvGrpSpPr>
+        <p:cNvPr id="1" name=""/>
+        <p:cNvGrpSpPr/>
+        <p:nvPr/>
+      </p:nvGrpSpPr>
+      <p:grpSpPr/>
+      <p:sp>
+        <p:nvSpPr>
+          <p:cNvPr id="2" name="TextBox 1"/>
+          <p:cNvSpPr txBox="1"/>
+          <p:nvPr/>
+        </p:nvSpPr>
+        <p:spPr>
+          <a:xfrm>
+            <a:off x="457200" y="274320"/>
+            <a:ext cx="8229600" cy="640080"/>
+          </a:xfrm>
+          <a:prstGeom prst="rect">
+            <a:avLst/>
+          </a:prstGeom>
+          <a:noFill/>
+        </p:spPr>
+        <p:txBody>
+          <a:bodyPr wrap="square">
+            <a:spAutoFit/>
+          </a:bodyPr>
+          <a:lstStyle/>
+          <a:p>
+            <a:r>
+              <a:rPr sz="2200" b="1">
+                <a:solidFill>
+                  <a:srgbClr val="0B3D2E"/>
+                </a:solidFill>
+              </a:rPr>
+              <a:t>Diagrama de la clase</a:t>
+            </a:r>
+          </a:p>
+        </p:txBody>
+      </p:sp>
+      <p:pic>
+        <p:nvPicPr>
+          <p:cNvPr id="3" name="Picture 2" descr="0bcc3ef3f88127a5.png"/>
+          <p:cNvPicPr>
+            <a:picLocks noChangeAspect="1"/>
+          </p:cNvPicPr>
+          <p:nvPr/>
+        </p:nvPicPr>
+        <p:blipFill>
+          <a:blip r:embed="rId2"/>
+          <a:stretch>
+            <a:fillRect/>
+          </a:stretch>
+        </p:blipFill>
+        <p:spPr>
+          <a:xfrm>
+            <a:off x="457200" y="3483864"/>
+            <a:ext cx="8229600" cy="530352"/>
+          </a:xfrm>
+          <a:prstGeom prst="rect">
+            <a:avLst/>
+          </a:prstGeom>
+        </p:spPr>
+      </p:pic>
     </p:spTree>
   </p:cSld>
   <p:clrMapOvr>
@@ -3713,7 +4239,7 @@
                   <a:srgbClr val="22282E"/>
                 </a:solidFill>
               </a:rPr>
-              <a:t>•  Aprender a usar los CIS Critical Security Controls v8.1, un conjunto priorizado y accionable de 18 controles y 153 salvaguardas que responde a la pregunta "¿por dónde empiezo?". Al terminar sabrás priorizar defensas con los Implementation Groups (IG1–IG3), aplicar los CIS Benchmarks para endurecer sistemas y usar los controles como plan de acción técnico concreto, complementario a CSF e ISO.</a:t>
+              <a:t>•  Aprender a usar los CIS Critical Security Controls v8.1, un conjunto priorizado y accionable de 18 controles y 153 salvaguardas que responde a la pregunta "¿por dónde empiezo?". Al terminar sabrás…</a:t>
             </a:r>
           </a:p>
         </p:txBody>
@@ -4107,7 +4633,7 @@
                   <a:srgbClr val="0B3D2E"/>
                 </a:solidFill>
               </a:rPr>
-              <a:t>📖 Definiciones y características</a:t>
+              <a:t>🧠 Explicación en profundidad</a:t>
             </a:r>
           </a:p>
         </p:txBody>
@@ -4145,97 +4671,22 @@
                   <a:srgbClr val="22282E"/>
                 </a:solidFill>
               </a:rPr>
-              <a:t>•  CIS Controls: conjunto priorizado de acciones defensivas contra los ataques más comunes. Clave: ordenados por impacto, no alfabéticamente.</a:t>
-            </a:r>
-          </a:p>
-          <a:p>
-            <a:pPr>
-              <a:spcAft>
-                <a:spcPts val="600"/>
-              </a:spcAft>
-            </a:pPr>
-            <a:r>
-              <a:rPr sz="1500">
-                <a:solidFill>
-                  <a:srgbClr val="22282E"/>
-                </a:solidFill>
-              </a:rPr>
-              <a:t>•  Salvaguarda (Safeguard): acción concreta y medible dentro de un control. Clave: v8.1 tiene 153 salvaguardas.</a:t>
-            </a:r>
-          </a:p>
-          <a:p>
-            <a:pPr>
-              <a:spcAft>
-                <a:spcPts val="600"/>
-              </a:spcAft>
-            </a:pPr>
-            <a:r>
-              <a:rPr sz="1500">
-                <a:solidFill>
-                  <a:srgbClr val="22282E"/>
-                </a:solidFill>
-              </a:rPr>
-              <a:t>•  IG1 (Implementation Group 1): higiene esencial para organizaciones pequeñas con recursos limitados. Clave: 56 salvaguardas base defendibles.</a:t>
-            </a:r>
-          </a:p>
-          <a:p>
-            <a:pPr>
-              <a:spcAft>
-                <a:spcPts val="600"/>
-              </a:spcAft>
-            </a:pPr>
-            <a:r>
-              <a:rPr sz="1500">
-                <a:solidFill>
-                  <a:srgbClr val="22282E"/>
-                </a:solidFill>
-              </a:rPr>
-              <a:t>•  IG2: para organizaciones con equipos dedicados de seguridad. Clave: incluye IG1 más controles avanzados.</a:t>
-            </a:r>
-          </a:p>
-          <a:p>
-            <a:pPr>
-              <a:spcAft>
-                <a:spcPts val="600"/>
-              </a:spcAft>
-            </a:pPr>
-            <a:r>
-              <a:rPr sz="1500">
-                <a:solidFill>
-                  <a:srgbClr val="22282E"/>
-                </a:solidFill>
-              </a:rPr>
-              <a:t>•  IG3: para entornos maduros con datos muy sensibles. Clave: las 153 salvaguardas.</a:t>
-            </a:r>
-          </a:p>
-          <a:p>
-            <a:pPr>
-              <a:spcAft>
-                <a:spcPts val="600"/>
-              </a:spcAft>
-            </a:pPr>
-            <a:r>
-              <a:rPr sz="1500">
-                <a:solidFill>
-                  <a:srgbClr val="22282E"/>
-                </a:solidFill>
-              </a:rPr>
-              <a:t>•  CIS Benchmark: guía de configuración segura para un producto concreto (Windows, Linux, AWS, etc.). Clave: endurecimiento reproducible y auditable.</a:t>
-            </a:r>
-          </a:p>
-          <a:p>
-            <a:pPr>
-              <a:spcAft>
-                <a:spcPts val="600"/>
-              </a:spcAft>
-            </a:pPr>
-            <a:r>
-              <a:rPr sz="1500">
-                <a:solidFill>
-                  <a:srgbClr val="22282E"/>
-                </a:solidFill>
-              </a:rPr>
-              <a:t>•  CIS-CAT: herramienta que evalúa el cumplimiento de un sistema frente a un Benchmark. Clave: automatiza la evidencia.</a:t>
+              <a:t>•  CIS Controls v8.1 prioriza salvaguardas operativas agrupadas en Implementation Groups. IG1 establece higiene esencial; IG2 e IG3 añaden alcance y complejidad para perfiles de riesgo mayores. Adoptar…</a:t>
+            </a:r>
+          </a:p>
+          <a:p>
+            <a:pPr>
+              <a:spcAft>
+                <a:spcPts val="600"/>
+              </a:spcAft>
+            </a:pPr>
+            <a:r>
+              <a:rPr sz="1500">
+                <a:solidFill>
+                  <a:srgbClr val="22282E"/>
+                </a:solidFill>
+              </a:rPr>
+              <a:t>•  Un equipo declara completo el inventario porque compró una herramienta. La prueba encuentra cuentas cloud y SaaS fuera de cobertura. Se define fuente autoritativa, reconciliación y métrica de activos…</a:t>
             </a:r>
           </a:p>
         </p:txBody>
@@ -4286,7 +4737,7 @@
                   <a:srgbClr val="0B3D2E"/>
                 </a:solidFill>
               </a:rPr>
-              <a:t>🧰 Herramientas y preparación</a:t>
+              <a:t>📔 Glosario operativo</a:t>
             </a:r>
           </a:p>
         </p:txBody>
@@ -4324,67 +4775,52 @@
                   <a:srgbClr val="22282E"/>
                 </a:solidFill>
               </a:rPr>
-              <a:t>•  El documento CIS Controls v8.1 (descarga gratuita tras registro en cisecurity.org).</a:t>
-            </a:r>
-          </a:p>
-          <a:p>
-            <a:pPr>
-              <a:spcAft>
-                <a:spcPts val="600"/>
-              </a:spcAft>
-            </a:pPr>
-            <a:r>
-              <a:rPr sz="1500">
-                <a:solidFill>
-                  <a:srgbClr val="22282E"/>
-                </a:solidFill>
-              </a:rPr>
-              <a:t>•  Un CIS Benchmark del sistema que quieras endurecer (Ubuntu, Windows 11, Docker, etc.).</a:t>
-            </a:r>
-          </a:p>
-          <a:p>
-            <a:pPr>
-              <a:spcAft>
-                <a:spcPts val="600"/>
-              </a:spcAft>
-            </a:pPr>
-            <a:r>
-              <a:rPr sz="1500">
-                <a:solidFill>
-                  <a:srgbClr val="22282E"/>
-                </a:solidFill>
-              </a:rPr>
-              <a:t>•  Opcional: CIS-CAT Lite (versión gratuita) o herramientas open source como Lynis (sudo apt install lynis) para auditar Linux.</a:t>
-            </a:r>
-          </a:p>
-          <a:p>
-            <a:pPr>
-              <a:spcAft>
-                <a:spcPts val="600"/>
-              </a:spcAft>
-            </a:pPr>
-            <a:r>
-              <a:rPr sz="1500">
-                <a:solidFill>
-                  <a:srgbClr val="22282E"/>
-                </a:solidFill>
-              </a:rPr>
-              <a:t>•  Una VM aislada de laboratorio para aplicar el endurecimiento (Ubuntu Server recomendado).</a:t>
-            </a:r>
-          </a:p>
-          <a:p>
-            <a:pPr>
-              <a:spcAft>
-                <a:spcPts val="600"/>
-              </a:spcAft>
-            </a:pPr>
-            <a:r>
-              <a:rPr sz="1500">
-                <a:solidFill>
-                  <a:srgbClr val="22282E"/>
-                </a:solidFill>
-              </a:rPr>
-              <a:t>•  Hoja de cálculo para el plan de salvaguardas IG1.</a:t>
+              <a:t>•  Término — Definición</a:t>
+            </a:r>
+          </a:p>
+          <a:p>
+            <a:pPr>
+              <a:spcAft>
+                <a:spcPts val="600"/>
+              </a:spcAft>
+            </a:pPr>
+            <a:r>
+              <a:rPr sz="1500">
+                <a:solidFill>
+                  <a:srgbClr val="22282E"/>
+                </a:solidFill>
+              </a:rPr>
+              <a:t>•  Salvaguarda — Acción específica incluida en CIS Controls.</a:t>
+            </a:r>
+          </a:p>
+          <a:p>
+            <a:pPr>
+              <a:spcAft>
+                <a:spcPts val="600"/>
+              </a:spcAft>
+            </a:pPr>
+            <a:r>
+              <a:rPr sz="1500">
+                <a:solidFill>
+                  <a:srgbClr val="22282E"/>
+                </a:solidFill>
+              </a:rPr>
+              <a:t>•  IG — Agrupación priorizada según recursos y perfil de riesgo.</a:t>
+            </a:r>
+          </a:p>
+          <a:p>
+            <a:pPr>
+              <a:spcAft>
+                <a:spcPts val="600"/>
+              </a:spcAft>
+            </a:pPr>
+            <a:r>
+              <a:rPr sz="1500">
+                <a:solidFill>
+                  <a:srgbClr val="22282E"/>
+                </a:solidFill>
+              </a:rPr>
+              <a:t>•  Cobertura — Proporción del alcance donde un control opera y se prueba.</a:t>
             </a:r>
           </a:p>
         </p:txBody>
@@ -4435,7 +4871,7 @@
                   <a:srgbClr val="0B3D2E"/>
                 </a:solidFill>
               </a:rPr>
-              <a:t>🧪 Laboratorio guiado (ejercicio aplicado)</a:t>
+              <a:t>✅ Criterio de dominio</a:t>
             </a:r>
           </a:p>
         </p:txBody>
@@ -4473,97 +4909,7 @@
                   <a:srgbClr val="22282E"/>
                 </a:solidFill>
               </a:rPr>
-              <a:t>•  Parte A — Plan de salvaguardas IG1 para "Ferretería del Sur S.A.":</a:t>
-            </a:r>
-          </a:p>
-          <a:p>
-            <a:pPr>
-              <a:spcAft>
-                <a:spcPts val="600"/>
-              </a:spcAft>
-            </a:pPr>
-            <a:r>
-              <a:rPr sz="1500">
-                <a:solidFill>
-                  <a:srgbClr val="22282E"/>
-                </a:solidFill>
-              </a:rPr>
-              <a:t>•  Descarga los CIS Controls v8.1 y filtra las salvaguardas marcadas como IG1.</a:t>
-            </a:r>
-          </a:p>
-          <a:p>
-            <a:pPr>
-              <a:spcAft>
-                <a:spcPts val="600"/>
-              </a:spcAft>
-            </a:pPr>
-            <a:r>
-              <a:rPr sz="1500">
-                <a:solidFill>
-                  <a:srgbClr val="22282E"/>
-                </a:solidFill>
-              </a:rPr>
-              <a:t>•  Inventario (Control 1 y 2): lista cómo mantendrías el inventario de activos y software; anota la herramienta que usarías.</a:t>
-            </a:r>
-          </a:p>
-          <a:p>
-            <a:pPr>
-              <a:spcAft>
-                <a:spcPts val="600"/>
-              </a:spcAft>
-            </a:pPr>
-            <a:r>
-              <a:rPr sz="1500">
-                <a:solidFill>
-                  <a:srgbClr val="22282E"/>
-                </a:solidFill>
-              </a:rPr>
-              <a:t>•  Selecciona 15 salvaguardas IG1 prioritarias (gestión de cuentas, MFA, configuración segura, copias de seguridad, formación) y ponlas en una hoja con: control, salvaguarda, estado actual, acción, responsable.</a:t>
-            </a:r>
-          </a:p>
-          <a:p>
-            <a:pPr>
-              <a:spcAft>
-                <a:spcPts val="600"/>
-              </a:spcAft>
-            </a:pPr>
-            <a:r>
-              <a:rPr sz="1500">
-                <a:solidFill>
-                  <a:srgbClr val="22282E"/>
-                </a:solidFill>
-              </a:rPr>
-              <a:t>•  Parte B — Endurecimiento con un Benchmark (VM Ubuntu):</a:t>
-            </a:r>
-          </a:p>
-          <a:p>
-            <a:pPr>
-              <a:spcAft>
-                <a:spcPts val="600"/>
-              </a:spcAft>
-            </a:pPr>
-            <a:r>
-              <a:rPr sz="1500">
-                <a:solidFill>
-                  <a:srgbClr val="22282E"/>
-                </a:solidFill>
-              </a:rPr>
-              <a:t>•  En tu VM aislada, ejecuta una auditoría base:</a:t>
-            </a:r>
-          </a:p>
-          <a:p>
-            <a:pPr>
-              <a:spcAft>
-                <a:spcPts val="600"/>
-              </a:spcAft>
-            </a:pPr>
-            <a:r>
-              <a:rPr sz="1500">
-                <a:solidFill>
-                  <a:srgbClr val="22282E"/>
-                </a:solidFill>
-              </a:rPr>
-              <a:t>•  sudo apt update &amp;&amp; sudo apt install -y lynis</a:t>
+              <a:t>•  El alumno selecciona IG con contexto y demuestra una salvaguarda mediante alcance, evidencia y prueba, no por presencia de herramienta.</a:t>
             </a:r>
           </a:p>
         </p:txBody>
@@ -4614,7 +4960,7 @@
                   <a:srgbClr val="0B3D2E"/>
                 </a:solidFill>
               </a:rPr>
-              <a:t>✍️ Ejercicios</a:t>
+              <a:t>📖 Definiciones y características</a:t>
             </a:r>
           </a:p>
         </p:txBody>
@@ -4652,82 +4998,97 @@
                   <a:srgbClr val="22282E"/>
                 </a:solidFill>
               </a:rPr>
-              <a:t>•  Ordena estos controles CIS por su número y explica por qué el inventario va primero.</a:t>
-            </a:r>
-          </a:p>
-          <a:p>
-            <a:pPr>
-              <a:spcAft>
-                <a:spcPts val="600"/>
-              </a:spcAft>
-            </a:pPr>
-            <a:r>
-              <a:rPr sz="1500">
-                <a:solidFill>
-                  <a:srgbClr val="22282E"/>
-                </a:solidFill>
-              </a:rPr>
-              <a:t>•  Una PYME sin equipo de seguridad: ¿qué IG le corresponde y por qué?</a:t>
-            </a:r>
-          </a:p>
-          <a:p>
-            <a:pPr>
-              <a:spcAft>
-                <a:spcPts val="600"/>
-              </a:spcAft>
-            </a:pPr>
-            <a:r>
-              <a:rPr sz="1500">
-                <a:solidFill>
-                  <a:srgbClr val="22282E"/>
-                </a:solidFill>
-              </a:rPr>
-              <a:t>•  Elige 5 salvaguardas IG1 y clasifícalas en preventivas o detectivas.</a:t>
-            </a:r>
-          </a:p>
-          <a:p>
-            <a:pPr>
-              <a:spcAft>
-                <a:spcPts val="600"/>
-              </a:spcAft>
-            </a:pPr>
-            <a:r>
-              <a:rPr sz="1500">
-                <a:solidFill>
-                  <a:srgbClr val="22282E"/>
-                </a:solidFill>
-              </a:rPr>
-              <a:t>•  Explica qué es un CIS Benchmark y da un ejemplo de regla de endurecimiento SSH.</a:t>
-            </a:r>
-          </a:p>
-          <a:p>
-            <a:pPr>
-              <a:spcAft>
-                <a:spcPts val="600"/>
-              </a:spcAft>
-            </a:pPr>
-            <a:r>
-              <a:rPr sz="1500">
-                <a:solidFill>
-                  <a:srgbClr val="22282E"/>
-                </a:solidFill>
-              </a:rPr>
-              <a:t>•  Mapea el control "MFA en accesos remotos" a CSF, ISO 27001 y PCI-DSS.</a:t>
-            </a:r>
-          </a:p>
-          <a:p>
-            <a:pPr>
-              <a:spcAft>
-                <a:spcPts val="600"/>
-              </a:spcAft>
-            </a:pPr>
-            <a:r>
-              <a:rPr sz="1500">
-                <a:solidFill>
-                  <a:srgbClr val="22282E"/>
-                </a:solidFill>
-              </a:rPr>
-              <a:t>•  Propón cómo medirías el porcentaje de salvaguardas IG1 implementadas.</a:t>
+              <a:t>•  CIS Controls: conjunto priorizado de acciones defensivas contra los ataques más comunes. Clave: ordenados por impacto, no alfabéticamente.</a:t>
+            </a:r>
+          </a:p>
+          <a:p>
+            <a:pPr>
+              <a:spcAft>
+                <a:spcPts val="600"/>
+              </a:spcAft>
+            </a:pPr>
+            <a:r>
+              <a:rPr sz="1500">
+                <a:solidFill>
+                  <a:srgbClr val="22282E"/>
+                </a:solidFill>
+              </a:rPr>
+              <a:t>•  Salvaguarda (Safeguard): acción concreta y medible dentro de un control. Clave: v8.1 tiene 153 salvaguardas.</a:t>
+            </a:r>
+          </a:p>
+          <a:p>
+            <a:pPr>
+              <a:spcAft>
+                <a:spcPts val="600"/>
+              </a:spcAft>
+            </a:pPr>
+            <a:r>
+              <a:rPr sz="1500">
+                <a:solidFill>
+                  <a:srgbClr val="22282E"/>
+                </a:solidFill>
+              </a:rPr>
+              <a:t>•  IG1 (Implementation Group 1): higiene esencial para organizaciones pequeñas con recursos limitados. Clave: 56 salvaguardas base defendibles.</a:t>
+            </a:r>
+          </a:p>
+          <a:p>
+            <a:pPr>
+              <a:spcAft>
+                <a:spcPts val="600"/>
+              </a:spcAft>
+            </a:pPr>
+            <a:r>
+              <a:rPr sz="1500">
+                <a:solidFill>
+                  <a:srgbClr val="22282E"/>
+                </a:solidFill>
+              </a:rPr>
+              <a:t>•  IG2: para organizaciones con equipos dedicados de seguridad. Clave: incluye IG1 más controles avanzados.</a:t>
+            </a:r>
+          </a:p>
+          <a:p>
+            <a:pPr>
+              <a:spcAft>
+                <a:spcPts val="600"/>
+              </a:spcAft>
+            </a:pPr>
+            <a:r>
+              <a:rPr sz="1500">
+                <a:solidFill>
+                  <a:srgbClr val="22282E"/>
+                </a:solidFill>
+              </a:rPr>
+              <a:t>•  IG3: para entornos maduros con datos muy sensibles. Clave: las 153 salvaguardas.</a:t>
+            </a:r>
+          </a:p>
+          <a:p>
+            <a:pPr>
+              <a:spcAft>
+                <a:spcPts val="600"/>
+              </a:spcAft>
+            </a:pPr>
+            <a:r>
+              <a:rPr sz="1500">
+                <a:solidFill>
+                  <a:srgbClr val="22282E"/>
+                </a:solidFill>
+              </a:rPr>
+              <a:t>•  CIS Benchmark: guía de configuración segura para un producto concreto (Windows, Linux, AWS, etc.). Clave: endurecimiento reproducible y auditable.</a:t>
+            </a:r>
+          </a:p>
+          <a:p>
+            <a:pPr>
+              <a:spcAft>
+                <a:spcPts val="600"/>
+              </a:spcAft>
+            </a:pPr>
+            <a:r>
+              <a:rPr sz="1500">
+                <a:solidFill>
+                  <a:srgbClr val="22282E"/>
+                </a:solidFill>
+              </a:rPr>
+              <a:t>•  CIS-CAT: herramienta que evalúa el cumplimiento de un sistema frente a un Benchmark. Clave: automatiza la evidencia.</a:t>
             </a:r>
           </a:p>
         </p:txBody>
@@ -4778,7 +5139,7 @@
                   <a:srgbClr val="0B3D2E"/>
                 </a:solidFill>
               </a:rPr>
-              <a:t>📝 Reto verificable</a:t>
+              <a:t>🧰 Herramientas y preparación</a:t>
             </a:r>
           </a:p>
         </p:txBody>
@@ -4816,22 +5177,67 @@
                   <a:srgbClr val="22282E"/>
                 </a:solidFill>
               </a:rPr>
-              <a:t>•  Entrega un plan de higiene cibernética IG1 con al menos 20 salvaguardas priorizadas (estado, acción, responsable) y evidencia de un endurecimiento real en VM (índice de Lynis antes/después de aplicar 3 medidas de un CIS Benchmark).</a:t>
-            </a:r>
-          </a:p>
-          <a:p>
-            <a:pPr>
-              <a:spcAft>
-                <a:spcPts val="600"/>
-              </a:spcAft>
-            </a:pPr>
-            <a:r>
-              <a:rPr sz="1500">
-                <a:solidFill>
-                  <a:srgbClr val="22282E"/>
-                </a:solidFill>
-              </a:rPr>
-              <a:t>•  Criterio de aceptación: el plan cubre al menos 8 de los 18 controles, el índice de Lynis mejora tras el endurecimiento, y 5 salvaguardas están mapeadas a CSF/ISO.</a:t>
+              <a:t>•  El documento CIS Controls v8.1 (descarga gratuita tras registro en cisecurity.org).</a:t>
+            </a:r>
+          </a:p>
+          <a:p>
+            <a:pPr>
+              <a:spcAft>
+                <a:spcPts val="600"/>
+              </a:spcAft>
+            </a:pPr>
+            <a:r>
+              <a:rPr sz="1500">
+                <a:solidFill>
+                  <a:srgbClr val="22282E"/>
+                </a:solidFill>
+              </a:rPr>
+              <a:t>•  Un CIS Benchmark del sistema que quieras endurecer (Ubuntu, Windows 11, Docker, etc.).</a:t>
+            </a:r>
+          </a:p>
+          <a:p>
+            <a:pPr>
+              <a:spcAft>
+                <a:spcPts val="600"/>
+              </a:spcAft>
+            </a:pPr>
+            <a:r>
+              <a:rPr sz="1500">
+                <a:solidFill>
+                  <a:srgbClr val="22282E"/>
+                </a:solidFill>
+              </a:rPr>
+              <a:t>•  Opcional: CIS-CAT Lite (versión gratuita) o herramientas open source como Lynis (sudo apt install lynis) para auditar Linux.</a:t>
+            </a:r>
+          </a:p>
+          <a:p>
+            <a:pPr>
+              <a:spcAft>
+                <a:spcPts val="600"/>
+              </a:spcAft>
+            </a:pPr>
+            <a:r>
+              <a:rPr sz="1500">
+                <a:solidFill>
+                  <a:srgbClr val="22282E"/>
+                </a:solidFill>
+              </a:rPr>
+              <a:t>•  Una VM aislada de laboratorio para aplicar el endurecimiento (Ubuntu Server recomendado).</a:t>
+            </a:r>
+          </a:p>
+          <a:p>
+            <a:pPr>
+              <a:spcAft>
+                <a:spcPts val="600"/>
+              </a:spcAft>
+            </a:pPr>
+            <a:r>
+              <a:rPr sz="1500">
+                <a:solidFill>
+                  <a:srgbClr val="22282E"/>
+                </a:solidFill>
+              </a:rPr>
+              <a:t>•  Hoja de cálculo para el plan de salvaguardas IG1.</a:t>
             </a:r>
           </a:p>
         </p:txBody>
